--- a/Selenium.pptx
+++ b/Selenium.pptx
@@ -13,23 +13,23 @@
     <p:sldId id="257" r:id="rId4"/>
     <p:sldId id="286" r:id="rId5"/>
     <p:sldId id="287" r:id="rId6"/>
-    <p:sldId id="288" r:id="rId7"/>
-    <p:sldId id="289" r:id="rId8"/>
-    <p:sldId id="290" r:id="rId9"/>
-    <p:sldId id="291" r:id="rId10"/>
-    <p:sldId id="292" r:id="rId11"/>
-    <p:sldId id="293" r:id="rId12"/>
+    <p:sldId id="293" r:id="rId7"/>
+    <p:sldId id="288" r:id="rId8"/>
+    <p:sldId id="289" r:id="rId9"/>
+    <p:sldId id="290" r:id="rId10"/>
+    <p:sldId id="291" r:id="rId11"/>
+    <p:sldId id="292" r:id="rId12"/>
     <p:sldId id="294" r:id="rId13"/>
     <p:sldId id="295" r:id="rId14"/>
     <p:sldId id="296" r:id="rId15"/>
     <p:sldId id="297" r:id="rId16"/>
     <p:sldId id="298" r:id="rId17"/>
-    <p:sldId id="299" r:id="rId18"/>
-    <p:sldId id="300" r:id="rId19"/>
-    <p:sldId id="304" r:id="rId20"/>
-    <p:sldId id="305" r:id="rId21"/>
-    <p:sldId id="306" r:id="rId22"/>
-    <p:sldId id="307" r:id="rId23"/>
+    <p:sldId id="304" r:id="rId18"/>
+    <p:sldId id="305" r:id="rId19"/>
+    <p:sldId id="306" r:id="rId20"/>
+    <p:sldId id="307" r:id="rId21"/>
+    <p:sldId id="299" r:id="rId22"/>
+    <p:sldId id="300" r:id="rId23"/>
     <p:sldId id="302" r:id="rId24"/>
     <p:sldId id="301" r:id="rId25"/>
     <p:sldId id="309" r:id="rId26"/>
@@ -320,23 +320,23 @@
             <p14:sldId id="257"/>
             <p14:sldId id="286"/>
             <p14:sldId id="287"/>
+            <p14:sldId id="293"/>
             <p14:sldId id="288"/>
             <p14:sldId id="289"/>
             <p14:sldId id="290"/>
             <p14:sldId id="291"/>
             <p14:sldId id="292"/>
-            <p14:sldId id="293"/>
             <p14:sldId id="294"/>
             <p14:sldId id="295"/>
             <p14:sldId id="296"/>
             <p14:sldId id="297"/>
             <p14:sldId id="298"/>
-            <p14:sldId id="299"/>
-            <p14:sldId id="300"/>
             <p14:sldId id="304"/>
             <p14:sldId id="305"/>
             <p14:sldId id="306"/>
             <p14:sldId id="307"/>
+            <p14:sldId id="299"/>
+            <p14:sldId id="300"/>
             <p14:sldId id="302"/>
             <p14:sldId id="301"/>
             <p14:sldId id="309"/>
@@ -4074,6 +4074,251 @@
 </file>
 
 <file path=ppt/slides/slide10.xml><?xml version="1.0" encoding="utf-8"?>
+<p:sld xmlns:a="http://schemas.openxmlformats.org/drawingml/2006/main" xmlns:r="http://schemas.openxmlformats.org/officeDocument/2006/relationships" xmlns:p="http://schemas.openxmlformats.org/presentationml/2006/main">
+  <p:cSld>
+    <p:spTree>
+      <p:nvGrpSpPr>
+        <p:cNvPr id="1" name=""/>
+        <p:cNvGrpSpPr/>
+        <p:nvPr/>
+      </p:nvGrpSpPr>
+      <p:grpSpPr>
+        <a:xfrm>
+          <a:off x="0" y="0"/>
+          <a:ext cx="0" cy="0"/>
+          <a:chOff x="0" y="0"/>
+          <a:chExt cx="0" cy="0"/>
+        </a:xfrm>
+      </p:grpSpPr>
+      <p:sp>
+        <p:nvSpPr>
+          <p:cNvPr id="2" name="Title 1">
+            <a:extLst>
+              <a:ext uri="{FF2B5EF4-FFF2-40B4-BE49-F238E27FC236}">
+                <a16:creationId xmlns:a16="http://schemas.microsoft.com/office/drawing/2014/main" id="{3E4411FD-D172-FAEC-00A3-6328FF6D00F1}"/>
+              </a:ext>
+            </a:extLst>
+          </p:cNvPr>
+          <p:cNvSpPr>
+            <a:spLocks noGrp="1"/>
+          </p:cNvSpPr>
+          <p:nvPr>
+            <p:ph type="title"/>
+          </p:nvPr>
+        </p:nvSpPr>
+        <p:spPr/>
+        <p:txBody>
+          <a:bodyPr>
+            <a:normAutofit fontScale="90000"/>
+          </a:bodyPr>
+          <a:lstStyle/>
+          <a:p>
+            <a:r>
+              <a:rPr lang="pl-PL" dirty="0"/>
+              <a:t>Architektura </a:t>
+            </a:r>
+            <a:r>
+              <a:rPr lang="pl-PL" dirty="0">
+                <a:solidFill>
+                  <a:srgbClr val="FF0000"/>
+                </a:solidFill>
+              </a:rPr>
+              <a:t>Selenium </a:t>
+            </a:r>
+            <a:r>
+              <a:rPr lang="pl-PL" dirty="0">
+                <a:solidFill>
+                  <a:schemeClr val="tx1"/>
+                </a:solidFill>
+              </a:rPr>
+              <a:t>– jak to działa?</a:t>
+            </a:r>
+            <a:endParaRPr lang="en-GB" dirty="0"/>
+          </a:p>
+        </p:txBody>
+      </p:sp>
+      <p:sp>
+        <p:nvSpPr>
+          <p:cNvPr id="3" name="Text Placeholder 2">
+            <a:extLst>
+              <a:ext uri="{FF2B5EF4-FFF2-40B4-BE49-F238E27FC236}">
+                <a16:creationId xmlns:a16="http://schemas.microsoft.com/office/drawing/2014/main" id="{5782DB4F-B6B0-4240-5691-1AEC179A4559}"/>
+              </a:ext>
+            </a:extLst>
+          </p:cNvPr>
+          <p:cNvSpPr>
+            <a:spLocks noGrp="1"/>
+          </p:cNvSpPr>
+          <p:nvPr>
+            <p:ph type="body" idx="1"/>
+          </p:nvPr>
+        </p:nvSpPr>
+        <p:spPr>
+          <a:xfrm>
+            <a:off x="312750" y="1943988"/>
+            <a:ext cx="11566500" cy="4538100"/>
+          </a:xfrm>
+        </p:spPr>
+        <p:txBody>
+          <a:bodyPr/>
+          <a:lstStyle/>
+          <a:p>
+            <a:pPr marL="101600" indent="0">
+              <a:buNone/>
+            </a:pPr>
+            <a:endParaRPr lang="pl-PL" b="1" dirty="0"/>
+          </a:p>
+          <a:p>
+            <a:pPr marL="101600" indent="0">
+              <a:buNone/>
+            </a:pPr>
+            <a:r>
+              <a:rPr lang="pl-PL" b="1" dirty="0"/>
+              <a:t>Browser driver</a:t>
+            </a:r>
+          </a:p>
+          <a:p>
+            <a:pPr marL="558800" lvl="1" indent="0">
+              <a:buNone/>
+            </a:pPr>
+            <a:r>
+              <a:rPr lang="pl-PL" dirty="0"/>
+              <a:t>Jest kluczowym elementem. </a:t>
+            </a:r>
+            <a:r>
+              <a:rPr lang="pl-PL" b="1" dirty="0">
+                <a:solidFill>
+                  <a:srgbClr val="FF0000"/>
+                </a:solidFill>
+              </a:rPr>
+              <a:t>chromedriver.exe</a:t>
+            </a:r>
+            <a:r>
+              <a:rPr lang="pl-PL" dirty="0"/>
+              <a:t> (dla Chrome) czy </a:t>
+            </a:r>
+            <a:r>
+              <a:rPr lang="pl-PL" b="1" dirty="0">
+                <a:solidFill>
+                  <a:srgbClr val="FF0000"/>
+                </a:solidFill>
+              </a:rPr>
+              <a:t>geckodriver.exe</a:t>
+            </a:r>
+            <a:r>
+              <a:rPr lang="pl-PL" b="1" dirty="0">
+                <a:solidFill>
+                  <a:schemeClr val="bg2"/>
+                </a:solidFill>
+              </a:rPr>
+              <a:t> </a:t>
+            </a:r>
+            <a:r>
+              <a:rPr lang="pl-PL" dirty="0">
+                <a:solidFill>
+                  <a:schemeClr val="bg2"/>
+                </a:solidFill>
+              </a:rPr>
+              <a:t>(dla Firefox) to małe serwery HTTP działające w tle.</a:t>
+            </a:r>
+          </a:p>
+          <a:p>
+            <a:pPr marL="844550" lvl="1" indent="-285750"/>
+            <a:r>
+              <a:rPr lang="pl-PL" b="1" dirty="0">
+                <a:solidFill>
+                  <a:schemeClr val="bg2"/>
+                </a:solidFill>
+              </a:rPr>
+              <a:t>Odbierają</a:t>
+            </a:r>
+            <a:r>
+              <a:rPr lang="pl-PL" dirty="0">
+                <a:solidFill>
+                  <a:schemeClr val="bg2"/>
+                </a:solidFill>
+              </a:rPr>
+              <a:t> zapytanie JSON od Twojego skryptu</a:t>
+            </a:r>
+          </a:p>
+          <a:p>
+            <a:pPr marL="844550" lvl="1" indent="-285750"/>
+            <a:r>
+              <a:rPr lang="pl-PL" b="1" dirty="0">
+                <a:solidFill>
+                  <a:schemeClr val="bg2"/>
+                </a:solidFill>
+              </a:rPr>
+              <a:t>Tłumaczą</a:t>
+            </a:r>
+            <a:r>
+              <a:rPr lang="pl-PL" dirty="0">
+                <a:solidFill>
+                  <a:schemeClr val="bg2"/>
+                </a:solidFill>
+              </a:rPr>
+              <a:t> je na komendy zrozumiałe dla konkretnej przeglądarki (używając wewnętrznych mechanizmów przeglądarki)</a:t>
+            </a:r>
+          </a:p>
+          <a:p>
+            <a:pPr marL="844550" lvl="1" indent="-285750"/>
+            <a:r>
+              <a:rPr lang="pl-PL" b="1" dirty="0">
+                <a:solidFill>
+                  <a:schemeClr val="bg2"/>
+                </a:solidFill>
+              </a:rPr>
+              <a:t>Wykonują</a:t>
+            </a:r>
+            <a:r>
+              <a:rPr lang="pl-PL" dirty="0">
+                <a:solidFill>
+                  <a:schemeClr val="bg2"/>
+                </a:solidFill>
+              </a:rPr>
+              <a:t> akcje fizycznie w oknie przeglądarki</a:t>
+            </a:r>
+          </a:p>
+          <a:p>
+            <a:pPr marL="844550" lvl="1" indent="-285750"/>
+            <a:r>
+              <a:rPr lang="pl-PL" b="1" dirty="0">
+                <a:solidFill>
+                  <a:schemeClr val="bg2"/>
+                </a:solidFill>
+              </a:rPr>
+              <a:t>Zwracają</a:t>
+            </a:r>
+            <a:r>
+              <a:rPr lang="pl-PL" dirty="0">
+                <a:solidFill>
+                  <a:schemeClr val="bg2"/>
+                </a:solidFill>
+              </a:rPr>
+              <a:t> odpowiedź do Twojego skryptu (pass lub fail)</a:t>
+            </a:r>
+            <a:endParaRPr lang="en-GB" dirty="0">
+              <a:solidFill>
+                <a:schemeClr val="bg2"/>
+              </a:solidFill>
+            </a:endParaRPr>
+          </a:p>
+        </p:txBody>
+      </p:sp>
+    </p:spTree>
+    <p:extLst>
+      <p:ext uri="{BB962C8B-B14F-4D97-AF65-F5344CB8AC3E}">
+        <p14:creationId xmlns:p14="http://schemas.microsoft.com/office/powerpoint/2010/main" val="2887287989"/>
+      </p:ext>
+    </p:extLst>
+  </p:cSld>
+  <p:clrMapOvr>
+    <a:masterClrMapping/>
+  </p:clrMapOvr>
+</p:sld>
+</file>
+
+<file path=ppt/slides/slide11.xml><?xml version="1.0" encoding="utf-8"?>
 <p:sld xmlns:a="http://schemas.openxmlformats.org/drawingml/2006/main" xmlns:r="http://schemas.openxmlformats.org/officeDocument/2006/relationships" xmlns:p="http://schemas.openxmlformats.org/presentationml/2006/main">
   <p:cSld>
     <p:spTree>
@@ -6380,158 +6625,6 @@
 </p:sld>
 </file>
 
-<file path=ppt/slides/slide11.xml><?xml version="1.0" encoding="utf-8"?>
-<p:sld xmlns:a="http://schemas.openxmlformats.org/drawingml/2006/main" xmlns:r="http://schemas.openxmlformats.org/officeDocument/2006/relationships" xmlns:p="http://schemas.openxmlformats.org/presentationml/2006/main">
-  <p:cSld>
-    <p:spTree>
-      <p:nvGrpSpPr>
-        <p:cNvPr id="1" name=""/>
-        <p:cNvGrpSpPr/>
-        <p:nvPr/>
-      </p:nvGrpSpPr>
-      <p:grpSpPr>
-        <a:xfrm>
-          <a:off x="0" y="0"/>
-          <a:ext cx="0" cy="0"/>
-          <a:chOff x="0" y="0"/>
-          <a:chExt cx="0" cy="0"/>
-        </a:xfrm>
-      </p:grpSpPr>
-      <p:sp>
-        <p:nvSpPr>
-          <p:cNvPr id="2" name="Title 1">
-            <a:extLst>
-              <a:ext uri="{FF2B5EF4-FFF2-40B4-BE49-F238E27FC236}">
-                <a16:creationId xmlns:a16="http://schemas.microsoft.com/office/drawing/2014/main" id="{46F383E4-41A2-B7F3-5B41-3E3843140B2A}"/>
-              </a:ext>
-            </a:extLst>
-          </p:cNvPr>
-          <p:cNvSpPr>
-            <a:spLocks noGrp="1"/>
-          </p:cNvSpPr>
-          <p:nvPr>
-            <p:ph type="title"/>
-          </p:nvPr>
-        </p:nvSpPr>
-        <p:spPr/>
-        <p:txBody>
-          <a:bodyPr>
-            <a:normAutofit fontScale="90000"/>
-          </a:bodyPr>
-          <a:lstStyle/>
-          <a:p>
-            <a:r>
-              <a:rPr lang="pl-PL" dirty="0"/>
-              <a:t>Dlaczego </a:t>
-            </a:r>
-            <a:r>
-              <a:rPr lang="pl-PL" dirty="0">
-                <a:solidFill>
-                  <a:srgbClr val="FF0000"/>
-                </a:solidFill>
-              </a:rPr>
-              <a:t>JavaScript</a:t>
-            </a:r>
-            <a:r>
-              <a:rPr lang="pl-PL" dirty="0"/>
-              <a:t>/</a:t>
-            </a:r>
-            <a:r>
-              <a:rPr lang="pl-PL" dirty="0">
-                <a:solidFill>
-                  <a:srgbClr val="FF0000"/>
-                </a:solidFill>
-              </a:rPr>
-              <a:t>TypeScript</a:t>
-            </a:r>
-            <a:r>
-              <a:rPr lang="pl-PL" dirty="0"/>
-              <a:t> to dobry wybór?</a:t>
-            </a:r>
-            <a:endParaRPr lang="en-GB" dirty="0"/>
-          </a:p>
-        </p:txBody>
-      </p:sp>
-      <p:sp>
-        <p:nvSpPr>
-          <p:cNvPr id="3" name="Text Placeholder 2">
-            <a:extLst>
-              <a:ext uri="{FF2B5EF4-FFF2-40B4-BE49-F238E27FC236}">
-                <a16:creationId xmlns:a16="http://schemas.microsoft.com/office/drawing/2014/main" id="{F2DF00AA-1B0B-3EDE-56D6-3B7AD4C0930E}"/>
-              </a:ext>
-            </a:extLst>
-          </p:cNvPr>
-          <p:cNvSpPr>
-            <a:spLocks noGrp="1"/>
-          </p:cNvSpPr>
-          <p:nvPr>
-            <p:ph type="body" idx="1"/>
-          </p:nvPr>
-        </p:nvSpPr>
-        <p:spPr>
-          <a:xfrm>
-            <a:off x="312750" y="2209164"/>
-            <a:ext cx="11566500" cy="4538100"/>
-          </a:xfrm>
-        </p:spPr>
-        <p:txBody>
-          <a:bodyPr/>
-          <a:lstStyle/>
-          <a:p>
-            <a:pPr marL="101600" indent="0">
-              <a:buNone/>
-            </a:pPr>
-            <a:r>
-              <a:rPr lang="pl-PL" dirty="0"/>
-              <a:t>Jeden język do wszystkiego – testerzy mogą pisać testy w tym samym języku, w którym programiści piszą frontend</a:t>
-            </a:r>
-          </a:p>
-          <a:p>
-            <a:pPr marL="101600" indent="0">
-              <a:buNone/>
-            </a:pPr>
-            <a:endParaRPr lang="pl-PL" dirty="0"/>
-          </a:p>
-          <a:p>
-            <a:pPr marL="101600" indent="0">
-              <a:buNone/>
-            </a:pPr>
-            <a:r>
-              <a:rPr lang="pl-PL" dirty="0"/>
-              <a:t>Asynchroniczność – JS/TS naturalnie radzi sobie z oczekiwaniem na elementy, co w testach webowych jest kluczowe (strony ładują się z różną prędkością)</a:t>
-            </a:r>
-          </a:p>
-          <a:p>
-            <a:pPr marL="101600" indent="0">
-              <a:buNone/>
-            </a:pPr>
-            <a:endParaRPr lang="pl-PL" dirty="0"/>
-          </a:p>
-          <a:p>
-            <a:pPr marL="101600" indent="0">
-              <a:buNone/>
-            </a:pPr>
-            <a:r>
-              <a:rPr lang="pl-PL" dirty="0"/>
-              <a:t>Ekosystem npm – dostęp do tysięcy gotowych bibliotek wspomagających testy</a:t>
-            </a:r>
-            <a:endParaRPr lang="en-GB" dirty="0"/>
-          </a:p>
-        </p:txBody>
-      </p:sp>
-    </p:spTree>
-    <p:extLst>
-      <p:ext uri="{BB962C8B-B14F-4D97-AF65-F5344CB8AC3E}">
-        <p14:creationId xmlns:p14="http://schemas.microsoft.com/office/powerpoint/2010/main" val="3893012038"/>
-      </p:ext>
-    </p:extLst>
-  </p:cSld>
-  <p:clrMapOvr>
-    <a:masterClrMapping/>
-  </p:clrMapOvr>
-</p:sld>
-</file>
-
 <file path=ppt/slides/slide12.xml><?xml version="1.0" encoding="utf-8"?>
 <p:sld xmlns:a="http://schemas.openxmlformats.org/drawingml/2006/main" xmlns:r="http://schemas.openxmlformats.org/officeDocument/2006/relationships" xmlns:p="http://schemas.openxmlformats.org/presentationml/2006/main">
   <p:cSld>
@@ -7328,39 +7421,10 @@
       </p:grpSpPr>
       <p:sp>
         <p:nvSpPr>
-          <p:cNvPr id="5" name="Subtitle 4">
-            <a:extLst>
-              <a:ext uri="{FF2B5EF4-FFF2-40B4-BE49-F238E27FC236}">
-                <a16:creationId xmlns:a16="http://schemas.microsoft.com/office/drawing/2014/main" id="{82397240-5E25-CE09-DFFB-BCE679AEF571}"/>
-              </a:ext>
-            </a:extLst>
-          </p:cNvPr>
-          <p:cNvSpPr>
-            <a:spLocks noGrp="1"/>
-          </p:cNvSpPr>
-          <p:nvPr>
-            <p:ph type="subTitle" idx="1"/>
-          </p:nvPr>
-        </p:nvSpPr>
-        <p:spPr/>
-        <p:txBody>
-          <a:bodyPr/>
-          <a:lstStyle/>
-          <a:p>
-            <a:r>
-              <a:rPr lang="pl-PL" dirty="0"/>
-              <a:t>Upewnijmy się, że wszystko działa</a:t>
-            </a:r>
-            <a:endParaRPr lang="en-GB" dirty="0"/>
-          </a:p>
-        </p:txBody>
-      </p:sp>
-      <p:sp>
-        <p:nvSpPr>
           <p:cNvPr id="4" name="Title 3">
             <a:extLst>
               <a:ext uri="{FF2B5EF4-FFF2-40B4-BE49-F238E27FC236}">
-                <a16:creationId xmlns:a16="http://schemas.microsoft.com/office/drawing/2014/main" id="{A9B18478-9219-CC9F-49BA-9217F12571E2}"/>
+                <a16:creationId xmlns:a16="http://schemas.microsoft.com/office/drawing/2014/main" id="{CC0ED450-684E-9E6D-41AD-C3413007EACC}"/>
               </a:ext>
             </a:extLst>
           </p:cNvPr>
@@ -7378,7 +7442,7 @@
           <a:p>
             <a:r>
               <a:rPr lang="pl-PL" dirty="0"/>
-              <a:t>Zanim przejdziemy dalej...</a:t>
+              <a:t>Czym jest asynchroniczność?</a:t>
             </a:r>
             <a:endParaRPr lang="en-GB" dirty="0"/>
           </a:p>
@@ -7387,7 +7451,7 @@
     </p:spTree>
     <p:extLst>
       <p:ext uri="{BB962C8B-B14F-4D97-AF65-F5344CB8AC3E}">
-        <p14:creationId xmlns:p14="http://schemas.microsoft.com/office/powerpoint/2010/main" val="3095941486"/>
+        <p14:creationId xmlns:p14="http://schemas.microsoft.com/office/powerpoint/2010/main" val="3332044461"/>
       </p:ext>
     </p:extLst>
   </p:cSld>
@@ -7419,7 +7483,7 @@
           <p:cNvPr id="2" name="Title 1">
             <a:extLst>
               <a:ext uri="{FF2B5EF4-FFF2-40B4-BE49-F238E27FC236}">
-                <a16:creationId xmlns:a16="http://schemas.microsoft.com/office/drawing/2014/main" id="{8DF6E173-8099-7477-0B89-DACBA7CA63DB}"/>
+                <a16:creationId xmlns:a16="http://schemas.microsoft.com/office/drawing/2014/main" id="{CE083D58-02B5-9484-5E9F-AC3080758836}"/>
               </a:ext>
             </a:extLst>
           </p:cNvPr>
@@ -7439,7 +7503,7 @@
           <a:p>
             <a:r>
               <a:rPr lang="pl-PL" dirty="0"/>
-              <a:t>Prosty </a:t>
+              <a:t>Koncept </a:t>
             </a:r>
             <a:r>
               <a:rPr lang="pl-PL" dirty="0">
@@ -7447,13 +7511,13 @@
                   <a:srgbClr val="FF0000"/>
                 </a:solidFill>
               </a:rPr>
-              <a:t>skrypt</a:t>
-            </a:r>
-            <a:r>
-              <a:rPr lang="pl-PL" dirty="0"/>
-              <a:t> odwiedzający stronę</a:t>
-            </a:r>
-            <a:endParaRPr lang="en-GB" dirty="0"/>
+              <a:t>asynchroniczności </a:t>
+            </a:r>
+            <a:endParaRPr lang="en-GB" dirty="0">
+              <a:solidFill>
+                <a:srgbClr val="FF0000"/>
+              </a:solidFill>
+            </a:endParaRPr>
           </a:p>
         </p:txBody>
       </p:sp>
@@ -7462,7 +7526,7 @@
           <p:cNvPr id="3" name="Text Placeholder 2">
             <a:extLst>
               <a:ext uri="{FF2B5EF4-FFF2-40B4-BE49-F238E27FC236}">
-                <a16:creationId xmlns:a16="http://schemas.microsoft.com/office/drawing/2014/main" id="{6BB1CFFB-7A2E-549C-6B28-486C2519F2C3}"/>
+                <a16:creationId xmlns:a16="http://schemas.microsoft.com/office/drawing/2014/main" id="{3C54CA5A-69EE-0D32-D407-A30C45A3F345}"/>
               </a:ext>
             </a:extLst>
           </p:cNvPr>
@@ -7473,88 +7537,167 @@
             <p:ph type="body" idx="1"/>
           </p:nvPr>
         </p:nvSpPr>
-        <p:spPr/>
+        <p:spPr>
+          <a:xfrm>
+            <a:off x="312750" y="1239900"/>
+            <a:ext cx="11566500" cy="5151450"/>
+          </a:xfrm>
+        </p:spPr>
         <p:txBody>
-          <a:bodyPr/>
+          <a:bodyPr>
+            <a:normAutofit/>
+          </a:bodyPr>
           <a:lstStyle/>
           <a:p>
             <a:pPr marL="101600" indent="0">
               <a:buNone/>
             </a:pPr>
+            <a:r>
+              <a:rPr lang="pl-PL" dirty="0"/>
+              <a:t>JavaScript działa </a:t>
+            </a:r>
+            <a:r>
+              <a:rPr lang="pl-PL" b="1" dirty="0"/>
+              <a:t>jednowątkowo. </a:t>
+            </a:r>
+            <a:r>
+              <a:rPr lang="pl-PL" dirty="0"/>
+              <a:t>Gdyby wszystkie operacje były synchroniczne strona „zawieszałaby się” podczas pobierania danych, a animacje nie działałyby płynnie. </a:t>
+            </a:r>
+            <a:r>
+              <a:rPr lang="pl-PL" b="1" dirty="0">
+                <a:solidFill>
+                  <a:srgbClr val="FF0000"/>
+                </a:solidFill>
+              </a:rPr>
+              <a:t>Asynchroniczność</a:t>
+            </a:r>
+            <a:r>
+              <a:rPr lang="pl-PL" dirty="0"/>
+              <a:t> pozwala powiedzieć: </a:t>
+            </a:r>
+            <a:r>
+              <a:rPr lang="pl-PL" b="1" dirty="0"/>
+              <a:t>„Wykonaj to zadanie w tle, a gdy się skończy – daj mi znać”</a:t>
+            </a:r>
+          </a:p>
+          <a:p>
+            <a:pPr marL="101600" indent="0">
+              <a:buNone/>
+            </a:pPr>
+            <a:endParaRPr lang="pl-PL" sz="1200" b="1" dirty="0"/>
+          </a:p>
+          <a:p>
+            <a:pPr marL="101600" indent="0">
+              <a:buNone/>
+            </a:pPr>
+            <a:r>
+              <a:rPr lang="pl-PL" dirty="0"/>
+              <a:t>Koncept asynchroniczności  - analogia restauracji:</a:t>
+            </a:r>
+          </a:p>
+          <a:p>
+            <a:pPr marL="101600" indent="0">
+              <a:buNone/>
+            </a:pPr>
             <a:endParaRPr lang="pl-PL" dirty="0"/>
           </a:p>
           <a:p>
-            <a:pPr marL="101600" indent="0">
+            <a:pPr marL="558800" lvl="1" indent="0">
+              <a:buNone/>
+            </a:pPr>
+            <a:r>
+              <a:rPr lang="pl-PL" dirty="0"/>
+              <a:t>Wyobraź sobie, że piszesz skrypt jako listę zadań dla kelnera:</a:t>
+            </a:r>
+          </a:p>
+          <a:p>
+            <a:pPr marL="1244600" lvl="2" indent="-228600">
+              <a:buFont typeface="+mj-lt"/>
+              <a:buAutoNum type="arabicPeriod"/>
+            </a:pPr>
+            <a:r>
+              <a:rPr lang="pl-PL" dirty="0"/>
+              <a:t>Przyjmij zamówienie</a:t>
+            </a:r>
+          </a:p>
+          <a:p>
+            <a:pPr marL="1244600" lvl="2" indent="-228600">
+              <a:buFont typeface="+mj-lt"/>
+              <a:buAutoNum type="arabicPeriod"/>
+            </a:pPr>
+            <a:r>
+              <a:rPr lang="pl-PL" dirty="0"/>
+              <a:t>Przynieś zupę</a:t>
+            </a:r>
+          </a:p>
+          <a:p>
+            <a:pPr marL="1244600" lvl="2" indent="-228600">
+              <a:buFont typeface="+mj-lt"/>
+              <a:buAutoNum type="arabicPeriod"/>
+            </a:pPr>
+            <a:r>
+              <a:rPr lang="pl-PL" dirty="0"/>
+              <a:t>Przynieś rachunek</a:t>
+            </a:r>
+          </a:p>
+          <a:p>
+            <a:pPr marL="1016000" lvl="2" indent="0">
               <a:buNone/>
             </a:pPr>
             <a:endParaRPr lang="pl-PL" dirty="0"/>
           </a:p>
           <a:p>
-            <a:pPr marL="101600" indent="0">
-              <a:buNone/>
-            </a:pPr>
+            <a:pPr marL="558800" lvl="1" indent="0">
+              <a:buNone/>
+            </a:pPr>
+            <a:r>
+              <a:rPr lang="pl-PL" dirty="0"/>
+              <a:t>W świecie </a:t>
+            </a:r>
+            <a:r>
+              <a:rPr lang="pl-PL" b="1" dirty="0"/>
+              <a:t>synchronicznym, </a:t>
+            </a:r>
+            <a:r>
+              <a:rPr lang="pl-PL" dirty="0"/>
+              <a:t>kelner po zamówieniu zupy stoi i patrzy na kucharza przez 15 minut, aż zupa będzie gotowa. Dopiero gdy ją dostanie rusza dalej. Cała restauracja stoi.</a:t>
+            </a:r>
+            <a:br>
+              <a:rPr lang="pl-PL" dirty="0"/>
+            </a:br>
+            <a:br>
+              <a:rPr lang="pl-PL" dirty="0"/>
+            </a:br>
+            <a:r>
+              <a:rPr lang="pl-PL" dirty="0"/>
+              <a:t>W świecie </a:t>
+            </a:r>
+            <a:r>
+              <a:rPr lang="pl-PL" b="1" dirty="0"/>
+              <a:t>asynchronicznym, </a:t>
+            </a:r>
+            <a:r>
+              <a:rPr lang="pl-PL" dirty="0"/>
+              <a:t>kelner wysyła zamówienie do kuchni i mówi: „Daj mi znać jak skończysz”. W międzyczasie może przyjąć zamówienie od innego stolika</a:t>
+            </a:r>
+            <a:br>
+              <a:rPr lang="pl-PL" dirty="0"/>
+            </a:br>
             <a:endParaRPr lang="pl-PL" dirty="0"/>
           </a:p>
           <a:p>
-            <a:pPr marL="101600" indent="0">
-              <a:buNone/>
-            </a:pPr>
-            <a:endParaRPr lang="pl-PL" dirty="0"/>
-          </a:p>
-          <a:p>
-            <a:pPr marL="101600" indent="0">
-              <a:buNone/>
-            </a:pPr>
-            <a:endParaRPr lang="pl-PL" dirty="0"/>
-          </a:p>
-          <a:p>
-            <a:pPr marL="101600" indent="0">
-              <a:buNone/>
-            </a:pPr>
-            <a:endParaRPr lang="pl-PL" dirty="0"/>
-          </a:p>
-          <a:p>
-            <a:pPr marL="101600" indent="0">
+            <a:pPr marL="558800" lvl="1" indent="0">
               <a:buNone/>
             </a:pPr>
             <a:endParaRPr lang="en-GB" dirty="0"/>
           </a:p>
         </p:txBody>
       </p:sp>
-      <p:pic>
-        <p:nvPicPr>
-          <p:cNvPr id="7" name="Picture 6" descr="A screen shot of a computer code&#10;&#10;AI-generated content may be incorrect.">
-            <a:extLst>
-              <a:ext uri="{FF2B5EF4-FFF2-40B4-BE49-F238E27FC236}">
-                <a16:creationId xmlns:a16="http://schemas.microsoft.com/office/drawing/2014/main" id="{6E327463-4545-BC7F-4FE5-6FF36C0B52C8}"/>
-              </a:ext>
-            </a:extLst>
-          </p:cNvPr>
-          <p:cNvPicPr>
-            <a:picLocks noChangeAspect="1"/>
-          </p:cNvPicPr>
-          <p:nvPr/>
-        </p:nvPicPr>
-        <p:blipFill>
-          <a:blip r:embed="rId2"/>
-          <a:stretch>
-            <a:fillRect/>
-          </a:stretch>
-        </p:blipFill>
-        <p:spPr>
-          <a:xfrm>
-            <a:off x="2826684" y="1719538"/>
-            <a:ext cx="6538632" cy="4058462"/>
-          </a:xfrm>
-          <a:prstGeom prst="rect">
-            <a:avLst/>
-          </a:prstGeom>
-        </p:spPr>
-      </p:pic>
     </p:spTree>
     <p:extLst>
       <p:ext uri="{BB962C8B-B14F-4D97-AF65-F5344CB8AC3E}">
-        <p14:creationId xmlns:p14="http://schemas.microsoft.com/office/powerpoint/2010/main" val="314290558"/>
+        <p14:creationId xmlns:p14="http://schemas.microsoft.com/office/powerpoint/2010/main" val="2439359610"/>
       </p:ext>
     </p:extLst>
   </p:cSld>
@@ -7583,10 +7726,10 @@
       </p:grpSpPr>
       <p:sp>
         <p:nvSpPr>
-          <p:cNvPr id="4" name="Title 3">
+          <p:cNvPr id="2" name="Title 1">
             <a:extLst>
               <a:ext uri="{FF2B5EF4-FFF2-40B4-BE49-F238E27FC236}">
-                <a16:creationId xmlns:a16="http://schemas.microsoft.com/office/drawing/2014/main" id="{CC0ED450-684E-9E6D-41AD-C3413007EACC}"/>
+                <a16:creationId xmlns:a16="http://schemas.microsoft.com/office/drawing/2014/main" id="{7964233C-345B-C545-62CD-700AE8AF2699}"/>
               </a:ext>
             </a:extLst>
           </p:cNvPr>
@@ -7594,26 +7737,138 @@
             <a:spLocks noGrp="1"/>
           </p:cNvSpPr>
           <p:nvPr>
-            <p:ph type="ctrTitle"/>
+            <p:ph type="title"/>
           </p:nvPr>
         </p:nvSpPr>
         <p:spPr/>
         <p:txBody>
+          <a:bodyPr>
+            <a:normAutofit fontScale="90000"/>
+          </a:bodyPr>
+          <a:lstStyle/>
+          <a:p>
+            <a:r>
+              <a:rPr lang="pl-PL" dirty="0"/>
+              <a:t>Koncept </a:t>
+            </a:r>
+            <a:r>
+              <a:rPr lang="pl-PL" dirty="0">
+                <a:solidFill>
+                  <a:srgbClr val="FF0000"/>
+                </a:solidFill>
+              </a:rPr>
+              <a:t>asynchroniczności</a:t>
+            </a:r>
+            <a:endParaRPr lang="en-GB" dirty="0">
+              <a:solidFill>
+                <a:srgbClr val="FF0000"/>
+              </a:solidFill>
+            </a:endParaRPr>
+          </a:p>
+        </p:txBody>
+      </p:sp>
+      <p:sp>
+        <p:nvSpPr>
+          <p:cNvPr id="3" name="Text Placeholder 2">
+            <a:extLst>
+              <a:ext uri="{FF2B5EF4-FFF2-40B4-BE49-F238E27FC236}">
+                <a16:creationId xmlns:a16="http://schemas.microsoft.com/office/drawing/2014/main" id="{5608F604-D8CB-8F26-623A-B8201EF8EA95}"/>
+              </a:ext>
+            </a:extLst>
+          </p:cNvPr>
+          <p:cNvSpPr>
+            <a:spLocks noGrp="1"/>
+          </p:cNvSpPr>
+          <p:nvPr>
+            <p:ph type="body" idx="1"/>
+          </p:nvPr>
+        </p:nvSpPr>
+        <p:spPr>
+          <a:xfrm>
+            <a:off x="312750" y="1715388"/>
+            <a:ext cx="11566500" cy="4538100"/>
+          </a:xfrm>
+        </p:spPr>
+        <p:txBody>
           <a:bodyPr/>
           <a:lstStyle/>
           <a:p>
+            <a:pPr marL="101600" indent="0">
+              <a:buNone/>
+            </a:pPr>
             <a:r>
               <a:rPr lang="pl-PL" dirty="0"/>
-              <a:t>Czym jest asynchroniczność?</a:t>
-            </a:r>
-            <a:endParaRPr lang="en-GB" dirty="0"/>
+              <a:t>W kontekście Selenium, kiedy Twój kod mówi driver.get(’google.com’), wysyła sygnał do przeglądarki. Przeglądarka potrzebuje czasu na załadowanie obrazków, skryptów i treści. JavaScript nie chce „zamrażać” całego komputera, więc domyślnie leci do następnej linijki kodu, nawet jeśli strona jeszcze się nie otworzyła.</a:t>
+            </a:r>
+          </a:p>
+          <a:p>
+            <a:pPr marL="101600" indent="0">
+              <a:buNone/>
+            </a:pPr>
+            <a:endParaRPr lang="pl-PL" dirty="0"/>
+          </a:p>
+          <a:p>
+            <a:pPr marL="101600" indent="0">
+              <a:buNone/>
+            </a:pPr>
+            <a:r>
+              <a:rPr lang="pl-PL" dirty="0"/>
+              <a:t>W Selenium prawie każda akcja jest </a:t>
+            </a:r>
+            <a:r>
+              <a:rPr lang="pl-PL" b="1" dirty="0">
+                <a:solidFill>
+                  <a:srgbClr val="FF0000"/>
+                </a:solidFill>
+              </a:rPr>
+              <a:t>obietnicą (Promise)</a:t>
+            </a:r>
+            <a:r>
+              <a:rPr lang="pl-PL" b="1" dirty="0">
+                <a:solidFill>
+                  <a:schemeClr val="tx1"/>
+                </a:solidFill>
+              </a:rPr>
+              <a:t>. </a:t>
+            </a:r>
+            <a:r>
+              <a:rPr lang="pl-PL" dirty="0">
+                <a:solidFill>
+                  <a:schemeClr val="tx1"/>
+                </a:solidFill>
+              </a:rPr>
+              <a:t>Obietnica to taki „bilet”, który mówi: „Teraz jeszcze nie mam wyniku, ale obiecuję że dam Ci go później (albo powiem że wystąpił błąd)”</a:t>
+            </a:r>
+          </a:p>
+          <a:p>
+            <a:pPr marL="101600" indent="0">
+              <a:buNone/>
+            </a:pPr>
+            <a:endParaRPr lang="pl-PL" b="1" dirty="0">
+              <a:solidFill>
+                <a:srgbClr val="FF0000"/>
+              </a:solidFill>
+            </a:endParaRPr>
+          </a:p>
+          <a:p>
+            <a:pPr marL="101600" indent="0">
+              <a:buNone/>
+            </a:pPr>
+            <a:r>
+              <a:rPr lang="pl-PL" b="1" dirty="0">
+                <a:solidFill>
+                  <a:schemeClr val="tx1"/>
+                </a:solidFill>
+              </a:rPr>
+              <a:t>Jeśli nie „poczekasz” na te obietnice, Twój skrypt na przykład spróbuje kliknąć w przycisk którego przeglądarka jeszcze nawet nie zdążyła narysować na ekranie</a:t>
+            </a:r>
           </a:p>
         </p:txBody>
       </p:sp>
     </p:spTree>
     <p:extLst>
       <p:ext uri="{BB962C8B-B14F-4D97-AF65-F5344CB8AC3E}">
-        <p14:creationId xmlns:p14="http://schemas.microsoft.com/office/powerpoint/2010/main" val="3332044461"/>
+        <p14:creationId xmlns:p14="http://schemas.microsoft.com/office/powerpoint/2010/main" val="432321064"/>
       </p:ext>
     </p:extLst>
   </p:cSld>
@@ -8112,7 +8367,7 @@
           <p:cNvPr id="2" name="Title 1">
             <a:extLst>
               <a:ext uri="{FF2B5EF4-FFF2-40B4-BE49-F238E27FC236}">
-                <a16:creationId xmlns:a16="http://schemas.microsoft.com/office/drawing/2014/main" id="{CE083D58-02B5-9484-5E9F-AC3080758836}"/>
+                <a16:creationId xmlns:a16="http://schemas.microsoft.com/office/drawing/2014/main" id="{C9186855-BEF8-D386-D448-38ACF49A7AA4}"/>
               </a:ext>
             </a:extLst>
           </p:cNvPr>
@@ -8140,7 +8395,7 @@
                   <a:srgbClr val="FF0000"/>
                 </a:solidFill>
               </a:rPr>
-              <a:t>asynchroniczności </a:t>
+              <a:t>asynchroniczności</a:t>
             </a:r>
             <a:endParaRPr lang="en-GB" dirty="0">
               <a:solidFill>
@@ -8155,7 +8410,7 @@
           <p:cNvPr id="3" name="Text Placeholder 2">
             <a:extLst>
               <a:ext uri="{FF2B5EF4-FFF2-40B4-BE49-F238E27FC236}">
-                <a16:creationId xmlns:a16="http://schemas.microsoft.com/office/drawing/2014/main" id="{3C54CA5A-69EE-0D32-D407-A30C45A3F345}"/>
+                <a16:creationId xmlns:a16="http://schemas.microsoft.com/office/drawing/2014/main" id="{F6DBFFF6-2DE6-A0F5-F492-DC6219CE7D74}"/>
               </a:ext>
             </a:extLst>
           </p:cNvPr>
@@ -8168,14 +8423,12 @@
         </p:nvSpPr>
         <p:spPr>
           <a:xfrm>
-            <a:off x="312750" y="1239900"/>
-            <a:ext cx="11566500" cy="5151450"/>
+            <a:off x="312750" y="1623948"/>
+            <a:ext cx="11566500" cy="4538100"/>
           </a:xfrm>
         </p:spPr>
         <p:txBody>
-          <a:bodyPr>
-            <a:normAutofit/>
-          </a:bodyPr>
+          <a:bodyPr/>
           <a:lstStyle/>
           <a:p>
             <a:pPr marL="101600" indent="0">
@@ -8183,15 +8436,7 @@
             </a:pPr>
             <a:r>
               <a:rPr lang="pl-PL" dirty="0"/>
-              <a:t>JavaScript działa </a:t>
-            </a:r>
-            <a:r>
-              <a:rPr lang="pl-PL" b="1" dirty="0"/>
-              <a:t>jednowątkowo. </a:t>
-            </a:r>
-            <a:r>
-              <a:rPr lang="pl-PL" dirty="0"/>
-              <a:t>Gdyby wszystkie operacje były synchroniczne strona „zawieszałaby się” podczas pobierania danych, a animacje nie działałyby płynnie. </a:t>
+              <a:t>Rozwiązanie problemu – metody </a:t>
             </a:r>
             <a:r>
               <a:rPr lang="pl-PL" b="1" dirty="0">
@@ -8199,134 +8444,130 @@
                   <a:srgbClr val="FF0000"/>
                 </a:solidFill>
               </a:rPr>
-              <a:t>Asynchroniczność</a:t>
-            </a:r>
-            <a:r>
-              <a:rPr lang="pl-PL" dirty="0"/>
-              <a:t> pozwala powiedzieć: </a:t>
-            </a:r>
-            <a:r>
-              <a:rPr lang="pl-PL" b="1" dirty="0"/>
-              <a:t>„Wykonaj to zadanie w tle, a gdy się skończy – daj mi znać”</a:t>
+              <a:t>async / await.</a:t>
             </a:r>
           </a:p>
           <a:p>
             <a:pPr marL="101600" indent="0">
               <a:buNone/>
             </a:pPr>
-            <a:endParaRPr lang="pl-PL" sz="1200" b="1" dirty="0"/>
+            <a:endParaRPr lang="pl-PL" b="1" dirty="0">
+              <a:solidFill>
+                <a:srgbClr val="FF0000"/>
+              </a:solidFill>
+            </a:endParaRPr>
           </a:p>
           <a:p>
             <a:pPr marL="101600" indent="0">
               <a:buNone/>
             </a:pPr>
             <a:r>
-              <a:rPr lang="pl-PL" dirty="0"/>
-              <a:t>Koncept asynchroniczności  - analogia restauracji:</a:t>
+              <a:rPr lang="pl-PL" b="1" dirty="0">
+                <a:solidFill>
+                  <a:srgbClr val="FF0000"/>
+                </a:solidFill>
+              </a:rPr>
+              <a:t>Async – </a:t>
+            </a:r>
+            <a:r>
+              <a:rPr lang="pl-PL" dirty="0">
+                <a:solidFill>
+                  <a:schemeClr val="bg2"/>
+                </a:solidFill>
+              </a:rPr>
+              <a:t>słowo kluczowe stawiane </a:t>
+            </a:r>
+            <a:r>
+              <a:rPr lang="pl-PL" b="1" dirty="0">
+                <a:solidFill>
+                  <a:schemeClr val="bg2"/>
+                </a:solidFill>
+              </a:rPr>
+              <a:t>przed funkcją</a:t>
+            </a:r>
+            <a:r>
+              <a:rPr lang="pl-PL" dirty="0">
+                <a:solidFill>
+                  <a:schemeClr val="bg2"/>
+                </a:solidFill>
+              </a:rPr>
+              <a:t>. Mówi ono: „uwaga, ta funkcja będzie zawierać zadania, na które trzeba będzie poczekać”. Funkcja oznaczona jako </a:t>
+            </a:r>
+            <a:r>
+              <a:rPr lang="pl-PL" b="1" dirty="0">
+                <a:solidFill>
+                  <a:srgbClr val="FF0000"/>
+                </a:solidFill>
+              </a:rPr>
+              <a:t>async </a:t>
+            </a:r>
+            <a:r>
+              <a:rPr lang="pl-PL" dirty="0">
+                <a:solidFill>
+                  <a:schemeClr val="tx1"/>
+                </a:solidFill>
+              </a:rPr>
+              <a:t>zawsze zwraca obietnicę</a:t>
             </a:r>
           </a:p>
           <a:p>
             <a:pPr marL="101600" indent="0">
               <a:buNone/>
             </a:pPr>
-            <a:endParaRPr lang="pl-PL" dirty="0"/>
-          </a:p>
-          <a:p>
-            <a:pPr marL="558800" lvl="1" indent="0">
-              <a:buNone/>
-            </a:pPr>
-            <a:r>
-              <a:rPr lang="pl-PL" dirty="0"/>
-              <a:t>Wyobraź sobie, że piszesz skrypt jako listę zadań dla kelnera:</a:t>
-            </a:r>
-          </a:p>
-          <a:p>
-            <a:pPr marL="1244600" lvl="2" indent="-228600">
-              <a:buFont typeface="+mj-lt"/>
-              <a:buAutoNum type="arabicPeriod"/>
-            </a:pPr>
-            <a:r>
-              <a:rPr lang="pl-PL" dirty="0"/>
-              <a:t>Przyjmij zamówienie</a:t>
-            </a:r>
-          </a:p>
-          <a:p>
-            <a:pPr marL="1244600" lvl="2" indent="-228600">
-              <a:buFont typeface="+mj-lt"/>
-              <a:buAutoNum type="arabicPeriod"/>
-            </a:pPr>
-            <a:r>
-              <a:rPr lang="pl-PL" dirty="0"/>
-              <a:t>Przynieś zupę</a:t>
-            </a:r>
-          </a:p>
-          <a:p>
-            <a:pPr marL="1244600" lvl="2" indent="-228600">
-              <a:buFont typeface="+mj-lt"/>
-              <a:buAutoNum type="arabicPeriod"/>
-            </a:pPr>
-            <a:r>
-              <a:rPr lang="pl-PL" dirty="0"/>
-              <a:t>Przynieś rachunek</a:t>
-            </a:r>
-          </a:p>
-          <a:p>
-            <a:pPr marL="1016000" lvl="2" indent="0">
-              <a:buNone/>
-            </a:pPr>
-            <a:endParaRPr lang="pl-PL" dirty="0"/>
-          </a:p>
-          <a:p>
-            <a:pPr marL="558800" lvl="1" indent="0">
-              <a:buNone/>
-            </a:pPr>
-            <a:r>
-              <a:rPr lang="pl-PL" dirty="0"/>
-              <a:t>W świecie </a:t>
-            </a:r>
-            <a:r>
-              <a:rPr lang="pl-PL" b="1" dirty="0"/>
-              <a:t>synchronicznym, </a:t>
-            </a:r>
-            <a:r>
-              <a:rPr lang="pl-PL" dirty="0"/>
-              <a:t>kelner po zamówieniu zupy stoi i patrzy na kucharza przez 15 minut, aż zupa będzie gotowa. Dopiero gdy ją dostanie rusza dalej. Cała restauracja stoi.</a:t>
-            </a:r>
-            <a:br>
-              <a:rPr lang="pl-PL" dirty="0"/>
-            </a:br>
-            <a:br>
-              <a:rPr lang="pl-PL" dirty="0"/>
-            </a:br>
-            <a:r>
-              <a:rPr lang="pl-PL" dirty="0"/>
-              <a:t>W świecie </a:t>
-            </a:r>
-            <a:r>
-              <a:rPr lang="pl-PL" b="1" dirty="0"/>
-              <a:t>asynchronicznym, </a:t>
-            </a:r>
-            <a:r>
-              <a:rPr lang="pl-PL" dirty="0"/>
-              <a:t>kelner wysyła zamówienie do kuchni i mówi: „Daj mi znać jak skończysz”. W międzyczasie może przyjąć zamówienie od innego stolika</a:t>
-            </a:r>
-            <a:br>
-              <a:rPr lang="pl-PL" dirty="0"/>
-            </a:br>
-            <a:endParaRPr lang="pl-PL" dirty="0"/>
-          </a:p>
-          <a:p>
-            <a:pPr marL="558800" lvl="1" indent="0">
-              <a:buNone/>
-            </a:pPr>
-            <a:endParaRPr lang="en-GB" dirty="0"/>
+            <a:endParaRPr lang="pl-PL" b="1" dirty="0">
+              <a:solidFill>
+                <a:schemeClr val="tx1"/>
+              </a:solidFill>
+            </a:endParaRPr>
+          </a:p>
+          <a:p>
+            <a:pPr marL="101600" indent="0">
+              <a:buNone/>
+            </a:pPr>
+            <a:r>
+              <a:rPr lang="pl-PL" b="1" dirty="0">
+                <a:solidFill>
+                  <a:srgbClr val="FF0000"/>
+                </a:solidFill>
+              </a:rPr>
+              <a:t>Await – </a:t>
+            </a:r>
+            <a:r>
+              <a:rPr lang="pl-PL" dirty="0">
+                <a:solidFill>
+                  <a:schemeClr val="tx1"/>
+                </a:solidFill>
+              </a:rPr>
+              <a:t>słowo kluczowe używane </a:t>
+            </a:r>
+            <a:r>
+              <a:rPr lang="pl-PL" b="1" dirty="0">
+                <a:solidFill>
+                  <a:schemeClr val="tx1"/>
+                </a:solidFill>
+              </a:rPr>
+              <a:t>wewnątrz</a:t>
+            </a:r>
+            <a:r>
+              <a:rPr lang="pl-PL" dirty="0">
+                <a:solidFill>
+                  <a:schemeClr val="tx1"/>
+                </a:solidFill>
+              </a:rPr>
+              <a:t> funkcji async. Mówi ono: „Zatrzymaj wykonywanie tego skryptu w tej linijce i czekaj, aż przeglądarka odpowie, że skończyła. Dopiero wtedy przejdź do następnej linii”</a:t>
+            </a:r>
+            <a:endParaRPr lang="en-GB" b="1" dirty="0">
+              <a:solidFill>
+                <a:srgbClr val="FF0000"/>
+              </a:solidFill>
+            </a:endParaRPr>
           </a:p>
         </p:txBody>
       </p:sp>
     </p:spTree>
     <p:extLst>
       <p:ext uri="{BB962C8B-B14F-4D97-AF65-F5344CB8AC3E}">
-        <p14:creationId xmlns:p14="http://schemas.microsoft.com/office/powerpoint/2010/main" val="2439359610"/>
+        <p14:creationId xmlns:p14="http://schemas.microsoft.com/office/powerpoint/2010/main" val="1530816260"/>
       </p:ext>
     </p:extLst>
   </p:cSld>
@@ -8355,10 +8596,10 @@
       </p:grpSpPr>
       <p:sp>
         <p:nvSpPr>
-          <p:cNvPr id="2" name="Title 1">
+          <p:cNvPr id="5" name="Subtitle 4">
             <a:extLst>
               <a:ext uri="{FF2B5EF4-FFF2-40B4-BE49-F238E27FC236}">
-                <a16:creationId xmlns:a16="http://schemas.microsoft.com/office/drawing/2014/main" id="{7964233C-345B-C545-62CD-700AE8AF2699}"/>
+                <a16:creationId xmlns:a16="http://schemas.microsoft.com/office/drawing/2014/main" id="{82397240-5E25-CE09-DFFB-BCE679AEF571}"/>
               </a:ext>
             </a:extLst>
           </p:cNvPr>
@@ -8366,42 +8607,28 @@
             <a:spLocks noGrp="1"/>
           </p:cNvSpPr>
           <p:nvPr>
-            <p:ph type="title"/>
+            <p:ph type="subTitle" idx="1"/>
           </p:nvPr>
         </p:nvSpPr>
         <p:spPr/>
         <p:txBody>
-          <a:bodyPr>
-            <a:normAutofit fontScale="90000"/>
-          </a:bodyPr>
+          <a:bodyPr/>
           <a:lstStyle/>
           <a:p>
             <a:r>
               <a:rPr lang="pl-PL" dirty="0"/>
-              <a:t>Koncept </a:t>
-            </a:r>
-            <a:r>
-              <a:rPr lang="pl-PL" dirty="0">
-                <a:solidFill>
-                  <a:srgbClr val="FF0000"/>
-                </a:solidFill>
-              </a:rPr>
-              <a:t>asynchroniczności</a:t>
-            </a:r>
-            <a:endParaRPr lang="en-GB" dirty="0">
-              <a:solidFill>
-                <a:srgbClr val="FF0000"/>
-              </a:solidFill>
-            </a:endParaRPr>
+              <a:t>Upewnijmy się, że wszystko działa</a:t>
+            </a:r>
+            <a:endParaRPr lang="en-GB" dirty="0"/>
           </a:p>
         </p:txBody>
       </p:sp>
       <p:sp>
         <p:nvSpPr>
-          <p:cNvPr id="3" name="Text Placeholder 2">
+          <p:cNvPr id="4" name="Title 3">
             <a:extLst>
               <a:ext uri="{FF2B5EF4-FFF2-40B4-BE49-F238E27FC236}">
-                <a16:creationId xmlns:a16="http://schemas.microsoft.com/office/drawing/2014/main" id="{5608F604-D8CB-8F26-623A-B8201EF8EA95}"/>
+                <a16:creationId xmlns:a16="http://schemas.microsoft.com/office/drawing/2014/main" id="{A9B18478-9219-CC9F-49BA-9217F12571E2}"/>
               </a:ext>
             </a:extLst>
           </p:cNvPr>
@@ -8409,95 +8636,26 @@
             <a:spLocks noGrp="1"/>
           </p:cNvSpPr>
           <p:nvPr>
-            <p:ph type="body" idx="1"/>
+            <p:ph type="ctrTitle"/>
           </p:nvPr>
         </p:nvSpPr>
-        <p:spPr>
-          <a:xfrm>
-            <a:off x="312750" y="1715388"/>
-            <a:ext cx="11566500" cy="4538100"/>
-          </a:xfrm>
-        </p:spPr>
+        <p:spPr/>
         <p:txBody>
           <a:bodyPr/>
           <a:lstStyle/>
           <a:p>
-            <a:pPr marL="101600" indent="0">
-              <a:buNone/>
-            </a:pPr>
             <a:r>
               <a:rPr lang="pl-PL" dirty="0"/>
-              <a:t>W kontekście Selenium, kiedy Twój kod mówi driver.get(’google.com’), wysyła sygnał do przeglądarki. Przeglądarka potrzebuje czasu na załadowanie obrazków, skryptów i treści. JavaScript nie chce „zamrażać” całego komputera, więc domyślnie leci do następnej linijki kodu, nawet jeśli strona jeszcze się nie otworzyła.</a:t>
-            </a:r>
-          </a:p>
-          <a:p>
-            <a:pPr marL="101600" indent="0">
-              <a:buNone/>
-            </a:pPr>
-            <a:endParaRPr lang="pl-PL" dirty="0"/>
-          </a:p>
-          <a:p>
-            <a:pPr marL="101600" indent="0">
-              <a:buNone/>
-            </a:pPr>
-            <a:r>
-              <a:rPr lang="pl-PL" dirty="0"/>
-              <a:t>W Selenium prawie każda akcja jest </a:t>
-            </a:r>
-            <a:r>
-              <a:rPr lang="pl-PL" b="1" dirty="0">
-                <a:solidFill>
-                  <a:srgbClr val="FF0000"/>
-                </a:solidFill>
-              </a:rPr>
-              <a:t>obietnicą (Promise)</a:t>
-            </a:r>
-            <a:r>
-              <a:rPr lang="pl-PL" b="1" dirty="0">
-                <a:solidFill>
-                  <a:schemeClr val="tx1"/>
-                </a:solidFill>
-              </a:rPr>
-              <a:t>. </a:t>
-            </a:r>
-            <a:r>
-              <a:rPr lang="pl-PL" dirty="0">
-                <a:solidFill>
-                  <a:schemeClr val="tx1"/>
-                </a:solidFill>
-              </a:rPr>
-              <a:t>Obietnica to taki „bilet”, który mówi: „Teraz jeszcze nie mam wyniku, ale obiecuję że dam Ci go później (albo powiem że wystąpił błąd)”</a:t>
-            </a:r>
-          </a:p>
-          <a:p>
-            <a:pPr marL="101600" indent="0">
-              <a:buNone/>
-            </a:pPr>
-            <a:endParaRPr lang="pl-PL" b="1" dirty="0">
-              <a:solidFill>
-                <a:srgbClr val="FF0000"/>
-              </a:solidFill>
-            </a:endParaRPr>
-          </a:p>
-          <a:p>
-            <a:pPr marL="101600" indent="0">
-              <a:buNone/>
-            </a:pPr>
-            <a:r>
-              <a:rPr lang="pl-PL" b="1" dirty="0">
-                <a:solidFill>
-                  <a:schemeClr val="tx1"/>
-                </a:solidFill>
-              </a:rPr>
-              <a:t>Jeśli nie „poczekasz” na te obietnice, Twój skrypt na przykład spróbuje kliknąć w przycisk którego przeglądarka jeszcze nawet nie zdążyła narysować na ekranie</a:t>
-            </a:r>
+              <a:t>Zanim przejdziemy dalej...</a:t>
+            </a:r>
+            <a:endParaRPr lang="en-GB" dirty="0"/>
           </a:p>
         </p:txBody>
       </p:sp>
     </p:spTree>
     <p:extLst>
       <p:ext uri="{BB962C8B-B14F-4D97-AF65-F5344CB8AC3E}">
-        <p14:creationId xmlns:p14="http://schemas.microsoft.com/office/powerpoint/2010/main" val="432321064"/>
+        <p14:creationId xmlns:p14="http://schemas.microsoft.com/office/powerpoint/2010/main" val="3095941486"/>
       </p:ext>
     </p:extLst>
   </p:cSld>
@@ -8529,7 +8687,7 @@
           <p:cNvPr id="2" name="Title 1">
             <a:extLst>
               <a:ext uri="{FF2B5EF4-FFF2-40B4-BE49-F238E27FC236}">
-                <a16:creationId xmlns:a16="http://schemas.microsoft.com/office/drawing/2014/main" id="{C9186855-BEF8-D386-D448-38ACF49A7AA4}"/>
+                <a16:creationId xmlns:a16="http://schemas.microsoft.com/office/drawing/2014/main" id="{8DF6E173-8099-7477-0B89-DACBA7CA63DB}"/>
               </a:ext>
             </a:extLst>
           </p:cNvPr>
@@ -8549,7 +8707,7 @@
           <a:p>
             <a:r>
               <a:rPr lang="pl-PL" dirty="0"/>
-              <a:t>Koncept </a:t>
+              <a:t>Prosty </a:t>
             </a:r>
             <a:r>
               <a:rPr lang="pl-PL" dirty="0">
@@ -8557,13 +8715,13 @@
                   <a:srgbClr val="FF0000"/>
                 </a:solidFill>
               </a:rPr>
-              <a:t>asynchroniczności</a:t>
-            </a:r>
-            <a:endParaRPr lang="en-GB" dirty="0">
-              <a:solidFill>
-                <a:srgbClr val="FF0000"/>
-              </a:solidFill>
-            </a:endParaRPr>
+              <a:t>skrypt</a:t>
+            </a:r>
+            <a:r>
+              <a:rPr lang="pl-PL" dirty="0"/>
+              <a:t> odwiedzający stronę</a:t>
+            </a:r>
+            <a:endParaRPr lang="en-GB" dirty="0"/>
           </a:p>
         </p:txBody>
       </p:sp>
@@ -8572,7 +8730,7 @@
           <p:cNvPr id="3" name="Text Placeholder 2">
             <a:extLst>
               <a:ext uri="{FF2B5EF4-FFF2-40B4-BE49-F238E27FC236}">
-                <a16:creationId xmlns:a16="http://schemas.microsoft.com/office/drawing/2014/main" id="{F6DBFFF6-2DE6-A0F5-F492-DC6219CE7D74}"/>
+                <a16:creationId xmlns:a16="http://schemas.microsoft.com/office/drawing/2014/main" id="{6BB1CFFB-7A2E-549C-6B28-486C2519F2C3}"/>
               </a:ext>
             </a:extLst>
           </p:cNvPr>
@@ -8583,12 +8741,7 @@
             <p:ph type="body" idx="1"/>
           </p:nvPr>
         </p:nvSpPr>
-        <p:spPr>
-          <a:xfrm>
-            <a:off x="312750" y="1623948"/>
-            <a:ext cx="11566500" cy="4538100"/>
-          </a:xfrm>
-        </p:spPr>
+        <p:spPr/>
         <p:txBody>
           <a:bodyPr/>
           <a:lstStyle/>
@@ -8596,140 +8749,80 @@
             <a:pPr marL="101600" indent="0">
               <a:buNone/>
             </a:pPr>
-            <a:r>
-              <a:rPr lang="pl-PL" dirty="0"/>
-              <a:t>Rozwiązanie problemu – metody </a:t>
-            </a:r>
-            <a:r>
-              <a:rPr lang="pl-PL" b="1" dirty="0">
-                <a:solidFill>
-                  <a:srgbClr val="FF0000"/>
-                </a:solidFill>
-              </a:rPr>
-              <a:t>async / await.</a:t>
-            </a:r>
+            <a:endParaRPr lang="pl-PL" dirty="0"/>
           </a:p>
           <a:p>
             <a:pPr marL="101600" indent="0">
               <a:buNone/>
             </a:pPr>
-            <a:endParaRPr lang="pl-PL" b="1" dirty="0">
-              <a:solidFill>
-                <a:srgbClr val="FF0000"/>
-              </a:solidFill>
-            </a:endParaRPr>
+            <a:endParaRPr lang="pl-PL" dirty="0"/>
           </a:p>
           <a:p>
             <a:pPr marL="101600" indent="0">
               <a:buNone/>
             </a:pPr>
-            <a:r>
-              <a:rPr lang="pl-PL" b="1" dirty="0">
-                <a:solidFill>
-                  <a:srgbClr val="FF0000"/>
-                </a:solidFill>
-              </a:rPr>
-              <a:t>Async – </a:t>
-            </a:r>
-            <a:r>
-              <a:rPr lang="pl-PL" dirty="0">
-                <a:solidFill>
-                  <a:schemeClr val="bg2"/>
-                </a:solidFill>
-              </a:rPr>
-              <a:t>słowo kluczowe stawiane </a:t>
-            </a:r>
-            <a:r>
-              <a:rPr lang="pl-PL" b="1" dirty="0">
-                <a:solidFill>
-                  <a:schemeClr val="bg2"/>
-                </a:solidFill>
-              </a:rPr>
-              <a:t>przed funkcją</a:t>
-            </a:r>
-            <a:r>
-              <a:rPr lang="pl-PL" dirty="0">
-                <a:solidFill>
-                  <a:schemeClr val="bg2"/>
-                </a:solidFill>
-              </a:rPr>
-              <a:t>. Mówi ono: „uwaga, ta funkcja będzie zawierać zadania, na które trzeba będzie poczekać”. Funkcja zonaczona jako </a:t>
-            </a:r>
-            <a:r>
-              <a:rPr lang="pl-PL" b="1" dirty="0">
-                <a:solidFill>
-                  <a:srgbClr val="FF0000"/>
-                </a:solidFill>
-              </a:rPr>
-              <a:t>async </a:t>
-            </a:r>
-            <a:r>
-              <a:rPr lang="pl-PL" dirty="0">
-                <a:solidFill>
-                  <a:schemeClr val="tx1"/>
-                </a:solidFill>
-              </a:rPr>
-              <a:t>zawsze zwraca obietnicę</a:t>
-            </a:r>
+            <a:endParaRPr lang="pl-PL" dirty="0"/>
           </a:p>
           <a:p>
             <a:pPr marL="101600" indent="0">
               <a:buNone/>
             </a:pPr>
-            <a:endParaRPr lang="pl-PL" b="1" dirty="0">
-              <a:solidFill>
-                <a:schemeClr val="tx1"/>
-              </a:solidFill>
-            </a:endParaRPr>
+            <a:endParaRPr lang="pl-PL" dirty="0"/>
           </a:p>
           <a:p>
             <a:pPr marL="101600" indent="0">
               <a:buNone/>
             </a:pPr>
-            <a:r>
-              <a:rPr lang="pl-PL" b="1" dirty="0">
-                <a:solidFill>
-                  <a:srgbClr val="FF0000"/>
-                </a:solidFill>
-              </a:rPr>
-              <a:t>Await – </a:t>
-            </a:r>
-            <a:r>
-              <a:rPr lang="pl-PL" dirty="0">
-                <a:solidFill>
-                  <a:schemeClr val="tx1"/>
-                </a:solidFill>
-              </a:rPr>
-              <a:t>słowo kluczowe używane </a:t>
-            </a:r>
-            <a:r>
-              <a:rPr lang="pl-PL" b="1" dirty="0">
-                <a:solidFill>
-                  <a:schemeClr val="tx1"/>
-                </a:solidFill>
-              </a:rPr>
-              <a:t>wewnątrz</a:t>
-            </a:r>
-            <a:r>
-              <a:rPr lang="pl-PL" dirty="0">
-                <a:solidFill>
-                  <a:schemeClr val="tx1"/>
-                </a:solidFill>
-              </a:rPr>
-              <a:t> funkcji async. Mówi ono: „Zatrzymaj wykonywanie tego skryptu w tej linijce i czekaj, aż przeglądarka odpowie, że skończyła. Dopiero wtedy przejdź do następnej linii”</a:t>
-            </a:r>
-            <a:endParaRPr lang="en-GB" b="1" dirty="0">
-              <a:solidFill>
-                <a:srgbClr val="FF0000"/>
-              </a:solidFill>
-            </a:endParaRPr>
+            <a:endParaRPr lang="pl-PL" dirty="0"/>
+          </a:p>
+          <a:p>
+            <a:pPr marL="101600" indent="0">
+              <a:buNone/>
+            </a:pPr>
+            <a:endParaRPr lang="pl-PL" dirty="0"/>
+          </a:p>
+          <a:p>
+            <a:pPr marL="101600" indent="0">
+              <a:buNone/>
+            </a:pPr>
+            <a:endParaRPr lang="en-GB" dirty="0"/>
           </a:p>
         </p:txBody>
       </p:sp>
+      <p:pic>
+        <p:nvPicPr>
+          <p:cNvPr id="7" name="Picture 6" descr="A screen shot of a computer code&#10;&#10;AI-generated content may be incorrect.">
+            <a:extLst>
+              <a:ext uri="{FF2B5EF4-FFF2-40B4-BE49-F238E27FC236}">
+                <a16:creationId xmlns:a16="http://schemas.microsoft.com/office/drawing/2014/main" id="{6E327463-4545-BC7F-4FE5-6FF36C0B52C8}"/>
+              </a:ext>
+            </a:extLst>
+          </p:cNvPr>
+          <p:cNvPicPr>
+            <a:picLocks noChangeAspect="1"/>
+          </p:cNvPicPr>
+          <p:nvPr/>
+        </p:nvPicPr>
+        <p:blipFill>
+          <a:blip r:embed="rId2"/>
+          <a:stretch>
+            <a:fillRect/>
+          </a:stretch>
+        </p:blipFill>
+        <p:spPr>
+          <a:xfrm>
+            <a:off x="2826684" y="1719538"/>
+            <a:ext cx="6538632" cy="4058462"/>
+          </a:xfrm>
+          <a:prstGeom prst="rect">
+            <a:avLst/>
+          </a:prstGeom>
+        </p:spPr>
+      </p:pic>
     </p:spTree>
     <p:extLst>
       <p:ext uri="{BB962C8B-B14F-4D97-AF65-F5344CB8AC3E}">
-        <p14:creationId xmlns:p14="http://schemas.microsoft.com/office/powerpoint/2010/main" val="1530816260"/>
+        <p14:creationId xmlns:p14="http://schemas.microsoft.com/office/powerpoint/2010/main" val="314290558"/>
       </p:ext>
     </p:extLst>
   </p:cSld>
@@ -13467,6 +13560,158 @@
           <p:cNvPr id="2" name="Title 1">
             <a:extLst>
               <a:ext uri="{FF2B5EF4-FFF2-40B4-BE49-F238E27FC236}">
+                <a16:creationId xmlns:a16="http://schemas.microsoft.com/office/drawing/2014/main" id="{46F383E4-41A2-B7F3-5B41-3E3843140B2A}"/>
+              </a:ext>
+            </a:extLst>
+          </p:cNvPr>
+          <p:cNvSpPr>
+            <a:spLocks noGrp="1"/>
+          </p:cNvSpPr>
+          <p:nvPr>
+            <p:ph type="title"/>
+          </p:nvPr>
+        </p:nvSpPr>
+        <p:spPr/>
+        <p:txBody>
+          <a:bodyPr>
+            <a:normAutofit fontScale="90000"/>
+          </a:bodyPr>
+          <a:lstStyle/>
+          <a:p>
+            <a:r>
+              <a:rPr lang="pl-PL" dirty="0"/>
+              <a:t>Dlaczego </a:t>
+            </a:r>
+            <a:r>
+              <a:rPr lang="pl-PL" dirty="0">
+                <a:solidFill>
+                  <a:srgbClr val="FF0000"/>
+                </a:solidFill>
+              </a:rPr>
+              <a:t>JavaScript</a:t>
+            </a:r>
+            <a:r>
+              <a:rPr lang="pl-PL" dirty="0"/>
+              <a:t>/</a:t>
+            </a:r>
+            <a:r>
+              <a:rPr lang="pl-PL" dirty="0">
+                <a:solidFill>
+                  <a:srgbClr val="FF0000"/>
+                </a:solidFill>
+              </a:rPr>
+              <a:t>TypeScript</a:t>
+            </a:r>
+            <a:r>
+              <a:rPr lang="pl-PL" dirty="0"/>
+              <a:t> to dobry wybór?</a:t>
+            </a:r>
+            <a:endParaRPr lang="en-GB" dirty="0"/>
+          </a:p>
+        </p:txBody>
+      </p:sp>
+      <p:sp>
+        <p:nvSpPr>
+          <p:cNvPr id="3" name="Text Placeholder 2">
+            <a:extLst>
+              <a:ext uri="{FF2B5EF4-FFF2-40B4-BE49-F238E27FC236}">
+                <a16:creationId xmlns:a16="http://schemas.microsoft.com/office/drawing/2014/main" id="{F2DF00AA-1B0B-3EDE-56D6-3B7AD4C0930E}"/>
+              </a:ext>
+            </a:extLst>
+          </p:cNvPr>
+          <p:cNvSpPr>
+            <a:spLocks noGrp="1"/>
+          </p:cNvSpPr>
+          <p:nvPr>
+            <p:ph type="body" idx="1"/>
+          </p:nvPr>
+        </p:nvSpPr>
+        <p:spPr>
+          <a:xfrm>
+            <a:off x="312750" y="2209164"/>
+            <a:ext cx="11566500" cy="4538100"/>
+          </a:xfrm>
+        </p:spPr>
+        <p:txBody>
+          <a:bodyPr/>
+          <a:lstStyle/>
+          <a:p>
+            <a:pPr marL="101600" indent="0">
+              <a:buNone/>
+            </a:pPr>
+            <a:r>
+              <a:rPr lang="pl-PL" dirty="0"/>
+              <a:t>Jeden język do wszystkiego – testerzy mogą pisać testy w tym samym języku, w którym programiści piszą frontend</a:t>
+            </a:r>
+          </a:p>
+          <a:p>
+            <a:pPr marL="101600" indent="0">
+              <a:buNone/>
+            </a:pPr>
+            <a:endParaRPr lang="pl-PL" dirty="0"/>
+          </a:p>
+          <a:p>
+            <a:pPr marL="101600" indent="0">
+              <a:buNone/>
+            </a:pPr>
+            <a:r>
+              <a:rPr lang="pl-PL" dirty="0"/>
+              <a:t>Asynchroniczność – JS/TS naturalnie radzi sobie z oczekiwaniem na elementy, co w testach webowych jest kluczowe (strony ładują się z różną prędkością)</a:t>
+            </a:r>
+          </a:p>
+          <a:p>
+            <a:pPr marL="101600" indent="0">
+              <a:buNone/>
+            </a:pPr>
+            <a:endParaRPr lang="pl-PL" dirty="0"/>
+          </a:p>
+          <a:p>
+            <a:pPr marL="101600" indent="0">
+              <a:buNone/>
+            </a:pPr>
+            <a:r>
+              <a:rPr lang="pl-PL" dirty="0"/>
+              <a:t>Ekosystem npm – dostęp do tysięcy gotowych bibliotek wspomagających testy</a:t>
+            </a:r>
+            <a:endParaRPr lang="en-GB" dirty="0"/>
+          </a:p>
+        </p:txBody>
+      </p:sp>
+    </p:spTree>
+    <p:extLst>
+      <p:ext uri="{BB962C8B-B14F-4D97-AF65-F5344CB8AC3E}">
+        <p14:creationId xmlns:p14="http://schemas.microsoft.com/office/powerpoint/2010/main" val="3893012038"/>
+      </p:ext>
+    </p:extLst>
+  </p:cSld>
+  <p:clrMapOvr>
+    <a:masterClrMapping/>
+  </p:clrMapOvr>
+</p:sld>
+</file>
+
+<file path=ppt/slides/slide7.xml><?xml version="1.0" encoding="utf-8"?>
+<p:sld xmlns:a="http://schemas.openxmlformats.org/drawingml/2006/main" xmlns:r="http://schemas.openxmlformats.org/officeDocument/2006/relationships" xmlns:p="http://schemas.openxmlformats.org/presentationml/2006/main">
+  <p:cSld>
+    <p:spTree>
+      <p:nvGrpSpPr>
+        <p:cNvPr id="1" name=""/>
+        <p:cNvGrpSpPr/>
+        <p:nvPr/>
+      </p:nvGrpSpPr>
+      <p:grpSpPr>
+        <a:xfrm>
+          <a:off x="0" y="0"/>
+          <a:ext cx="0" cy="0"/>
+          <a:chOff x="0" y="0"/>
+          <a:chExt cx="0" cy="0"/>
+        </a:xfrm>
+      </p:grpSpPr>
+      <p:sp>
+        <p:nvSpPr>
+          <p:cNvPr id="2" name="Title 1">
+            <a:extLst>
+              <a:ext uri="{FF2B5EF4-FFF2-40B4-BE49-F238E27FC236}">
                 <a16:creationId xmlns:a16="http://schemas.microsoft.com/office/drawing/2014/main" id="{DCCCE0FD-D17B-6FF1-01BA-48A016EBC2E6}"/>
               </a:ext>
             </a:extLst>
@@ -13725,7 +13970,7 @@
 </p:sld>
 </file>
 
-<file path=ppt/slides/slide7.xml><?xml version="1.0" encoding="utf-8"?>
+<file path=ppt/slides/slide8.xml><?xml version="1.0" encoding="utf-8"?>
 <p:sld xmlns:a="http://schemas.openxmlformats.org/drawingml/2006/main" xmlns:r="http://schemas.openxmlformats.org/officeDocument/2006/relationships" xmlns:p="http://schemas.openxmlformats.org/presentationml/2006/main">
   <p:cSld>
     <p:spTree>
@@ -13934,7 +14179,7 @@
 </p:sld>
 </file>
 
-<file path=ppt/slides/slide8.xml><?xml version="1.0" encoding="utf-8"?>
+<file path=ppt/slides/slide9.xml><?xml version="1.0" encoding="utf-8"?>
 <p:sld xmlns:a="http://schemas.openxmlformats.org/drawingml/2006/main" xmlns:r="http://schemas.openxmlformats.org/officeDocument/2006/relationships" xmlns:p="http://schemas.openxmlformats.org/presentationml/2006/main">
   <p:cSld>
     <p:spTree>
@@ -14145,251 +14390,6 @@
     <p:extLst>
       <p:ext uri="{BB962C8B-B14F-4D97-AF65-F5344CB8AC3E}">
         <p14:creationId xmlns:p14="http://schemas.microsoft.com/office/powerpoint/2010/main" val="1578772571"/>
-      </p:ext>
-    </p:extLst>
-  </p:cSld>
-  <p:clrMapOvr>
-    <a:masterClrMapping/>
-  </p:clrMapOvr>
-</p:sld>
-</file>
-
-<file path=ppt/slides/slide9.xml><?xml version="1.0" encoding="utf-8"?>
-<p:sld xmlns:a="http://schemas.openxmlformats.org/drawingml/2006/main" xmlns:r="http://schemas.openxmlformats.org/officeDocument/2006/relationships" xmlns:p="http://schemas.openxmlformats.org/presentationml/2006/main">
-  <p:cSld>
-    <p:spTree>
-      <p:nvGrpSpPr>
-        <p:cNvPr id="1" name=""/>
-        <p:cNvGrpSpPr/>
-        <p:nvPr/>
-      </p:nvGrpSpPr>
-      <p:grpSpPr>
-        <a:xfrm>
-          <a:off x="0" y="0"/>
-          <a:ext cx="0" cy="0"/>
-          <a:chOff x="0" y="0"/>
-          <a:chExt cx="0" cy="0"/>
-        </a:xfrm>
-      </p:grpSpPr>
-      <p:sp>
-        <p:nvSpPr>
-          <p:cNvPr id="2" name="Title 1">
-            <a:extLst>
-              <a:ext uri="{FF2B5EF4-FFF2-40B4-BE49-F238E27FC236}">
-                <a16:creationId xmlns:a16="http://schemas.microsoft.com/office/drawing/2014/main" id="{3E4411FD-D172-FAEC-00A3-6328FF6D00F1}"/>
-              </a:ext>
-            </a:extLst>
-          </p:cNvPr>
-          <p:cNvSpPr>
-            <a:spLocks noGrp="1"/>
-          </p:cNvSpPr>
-          <p:nvPr>
-            <p:ph type="title"/>
-          </p:nvPr>
-        </p:nvSpPr>
-        <p:spPr/>
-        <p:txBody>
-          <a:bodyPr>
-            <a:normAutofit fontScale="90000"/>
-          </a:bodyPr>
-          <a:lstStyle/>
-          <a:p>
-            <a:r>
-              <a:rPr lang="pl-PL" dirty="0"/>
-              <a:t>Architektura </a:t>
-            </a:r>
-            <a:r>
-              <a:rPr lang="pl-PL" dirty="0">
-                <a:solidFill>
-                  <a:srgbClr val="FF0000"/>
-                </a:solidFill>
-              </a:rPr>
-              <a:t>Selenium </a:t>
-            </a:r>
-            <a:r>
-              <a:rPr lang="pl-PL" dirty="0">
-                <a:solidFill>
-                  <a:schemeClr val="tx1"/>
-                </a:solidFill>
-              </a:rPr>
-              <a:t>– jak to działa?</a:t>
-            </a:r>
-            <a:endParaRPr lang="en-GB" dirty="0"/>
-          </a:p>
-        </p:txBody>
-      </p:sp>
-      <p:sp>
-        <p:nvSpPr>
-          <p:cNvPr id="3" name="Text Placeholder 2">
-            <a:extLst>
-              <a:ext uri="{FF2B5EF4-FFF2-40B4-BE49-F238E27FC236}">
-                <a16:creationId xmlns:a16="http://schemas.microsoft.com/office/drawing/2014/main" id="{5782DB4F-B6B0-4240-5691-1AEC179A4559}"/>
-              </a:ext>
-            </a:extLst>
-          </p:cNvPr>
-          <p:cNvSpPr>
-            <a:spLocks noGrp="1"/>
-          </p:cNvSpPr>
-          <p:nvPr>
-            <p:ph type="body" idx="1"/>
-          </p:nvPr>
-        </p:nvSpPr>
-        <p:spPr>
-          <a:xfrm>
-            <a:off x="312750" y="1943988"/>
-            <a:ext cx="11566500" cy="4538100"/>
-          </a:xfrm>
-        </p:spPr>
-        <p:txBody>
-          <a:bodyPr/>
-          <a:lstStyle/>
-          <a:p>
-            <a:pPr marL="101600" indent="0">
-              <a:buNone/>
-            </a:pPr>
-            <a:endParaRPr lang="pl-PL" b="1" dirty="0"/>
-          </a:p>
-          <a:p>
-            <a:pPr marL="101600" indent="0">
-              <a:buNone/>
-            </a:pPr>
-            <a:r>
-              <a:rPr lang="pl-PL" b="1" dirty="0"/>
-              <a:t>Browser driver</a:t>
-            </a:r>
-          </a:p>
-          <a:p>
-            <a:pPr marL="558800" lvl="1" indent="0">
-              <a:buNone/>
-            </a:pPr>
-            <a:r>
-              <a:rPr lang="pl-PL" dirty="0"/>
-              <a:t>Jest kluczowym elementem. </a:t>
-            </a:r>
-            <a:r>
-              <a:rPr lang="pl-PL" b="1" dirty="0">
-                <a:solidFill>
-                  <a:srgbClr val="FF0000"/>
-                </a:solidFill>
-              </a:rPr>
-              <a:t>chromedriver.exe</a:t>
-            </a:r>
-            <a:r>
-              <a:rPr lang="pl-PL" dirty="0"/>
-              <a:t> (dla Chrome) czy </a:t>
-            </a:r>
-            <a:r>
-              <a:rPr lang="pl-PL" b="1" dirty="0">
-                <a:solidFill>
-                  <a:srgbClr val="FF0000"/>
-                </a:solidFill>
-              </a:rPr>
-              <a:t>geckodriver.exe</a:t>
-            </a:r>
-            <a:r>
-              <a:rPr lang="pl-PL" b="1" dirty="0">
-                <a:solidFill>
-                  <a:schemeClr val="bg2"/>
-                </a:solidFill>
-              </a:rPr>
-              <a:t> </a:t>
-            </a:r>
-            <a:r>
-              <a:rPr lang="pl-PL" dirty="0">
-                <a:solidFill>
-                  <a:schemeClr val="bg2"/>
-                </a:solidFill>
-              </a:rPr>
-              <a:t>(dla Firefox) to małe serwery HTTP działające w tle.</a:t>
-            </a:r>
-          </a:p>
-          <a:p>
-            <a:pPr marL="844550" lvl="1" indent="-285750"/>
-            <a:r>
-              <a:rPr lang="pl-PL" b="1" dirty="0">
-                <a:solidFill>
-                  <a:schemeClr val="bg2"/>
-                </a:solidFill>
-              </a:rPr>
-              <a:t>Odbierają</a:t>
-            </a:r>
-            <a:r>
-              <a:rPr lang="pl-PL" dirty="0">
-                <a:solidFill>
-                  <a:schemeClr val="bg2"/>
-                </a:solidFill>
-              </a:rPr>
-              <a:t> zapytanie JSON od Twojego skryptu</a:t>
-            </a:r>
-          </a:p>
-          <a:p>
-            <a:pPr marL="844550" lvl="1" indent="-285750"/>
-            <a:r>
-              <a:rPr lang="pl-PL" b="1" dirty="0">
-                <a:solidFill>
-                  <a:schemeClr val="bg2"/>
-                </a:solidFill>
-              </a:rPr>
-              <a:t>Tłumaczą</a:t>
-            </a:r>
-            <a:r>
-              <a:rPr lang="pl-PL" dirty="0">
-                <a:solidFill>
-                  <a:schemeClr val="bg2"/>
-                </a:solidFill>
-              </a:rPr>
-              <a:t> je na komendy zrozumiałe dla konkretnej przeglądarki (używając wewnętrznych mechanizmów przeglądarki)</a:t>
-            </a:r>
-          </a:p>
-          <a:p>
-            <a:pPr marL="844550" lvl="1" indent="-285750"/>
-            <a:r>
-              <a:rPr lang="pl-PL" b="1" dirty="0">
-                <a:solidFill>
-                  <a:schemeClr val="bg2"/>
-                </a:solidFill>
-              </a:rPr>
-              <a:t>Wykonują</a:t>
-            </a:r>
-            <a:r>
-              <a:rPr lang="pl-PL" dirty="0">
-                <a:solidFill>
-                  <a:schemeClr val="bg2"/>
-                </a:solidFill>
-              </a:rPr>
-              <a:t> akcje fizycznie w oknie przeglądarki</a:t>
-            </a:r>
-          </a:p>
-          <a:p>
-            <a:pPr marL="844550" lvl="1" indent="-285750"/>
-            <a:r>
-              <a:rPr lang="pl-PL" b="1" dirty="0">
-                <a:solidFill>
-                  <a:schemeClr val="bg2"/>
-                </a:solidFill>
-              </a:rPr>
-              <a:t>Zwracają</a:t>
-            </a:r>
-            <a:r>
-              <a:rPr lang="pl-PL" dirty="0">
-                <a:solidFill>
-                  <a:schemeClr val="bg2"/>
-                </a:solidFill>
-              </a:rPr>
-              <a:t> odpowiedź do Twojego skryptu (pass lub fail)</a:t>
-            </a:r>
-            <a:endParaRPr lang="en-GB" dirty="0">
-              <a:solidFill>
-                <a:schemeClr val="bg2"/>
-              </a:solidFill>
-            </a:endParaRPr>
-          </a:p>
-        </p:txBody>
-      </p:sp>
-    </p:spTree>
-    <p:extLst>
-      <p:ext uri="{BB962C8B-B14F-4D97-AF65-F5344CB8AC3E}">
-        <p14:creationId xmlns:p14="http://schemas.microsoft.com/office/powerpoint/2010/main" val="2887287989"/>
       </p:ext>
     </p:extLst>
   </p:cSld>
